--- a/hinges_knobs.pptx
+++ b/hinges_knobs.pptx
@@ -201,7 +201,7 @@
           <a:p>
             <a:fld id="{D2843BDE-B8C0-934E-9704-CBA3B88C1FB8}" type="datetimeFigureOut">
               <a:rPr lang="en-US" smtClean="0"/>
-              <a:t>6/16/24</a:t>
+              <a:t>6/22/24</a:t>
             </a:fld>
             <a:endParaRPr lang="en-US"/>
           </a:p>
@@ -890,7 +890,7 @@
           <a:lstStyle/>
           <a:p>
             <a:fld id="{5F491023-0B0A-7041-9F06-D25A50EF063B}" type="datetimeFigureOut">
-              <a:t>6/16/24</a:t>
+              <a:t>6/22/24</a:t>
             </a:fld>
             <a:endParaRPr lang="en-US"/>
           </a:p>
@@ -1086,7 +1086,7 @@
           <a:lstStyle/>
           <a:p>
             <a:fld id="{5F491023-0B0A-7041-9F06-D25A50EF063B}" type="datetimeFigureOut">
-              <a:t>6/16/24</a:t>
+              <a:t>6/22/24</a:t>
             </a:fld>
             <a:endParaRPr lang="en-US"/>
           </a:p>
@@ -1292,7 +1292,7 @@
           <a:lstStyle/>
           <a:p>
             <a:fld id="{5F491023-0B0A-7041-9F06-D25A50EF063B}" type="datetimeFigureOut">
-              <a:t>6/16/24</a:t>
+              <a:t>6/22/24</a:t>
             </a:fld>
             <a:endParaRPr lang="en-US"/>
           </a:p>
@@ -1488,7 +1488,7 @@
           <a:lstStyle/>
           <a:p>
             <a:fld id="{5F491023-0B0A-7041-9F06-D25A50EF063B}" type="datetimeFigureOut">
-              <a:t>6/16/24</a:t>
+              <a:t>6/22/24</a:t>
             </a:fld>
             <a:endParaRPr lang="en-US"/>
           </a:p>
@@ -1761,7 +1761,7 @@
           <a:lstStyle/>
           <a:p>
             <a:fld id="{5F491023-0B0A-7041-9F06-D25A50EF063B}" type="datetimeFigureOut">
-              <a:t>6/16/24</a:t>
+              <a:t>6/22/24</a:t>
             </a:fld>
             <a:endParaRPr lang="en-US"/>
           </a:p>
@@ -2024,7 +2024,7 @@
           <a:lstStyle/>
           <a:p>
             <a:fld id="{5F491023-0B0A-7041-9F06-D25A50EF063B}" type="datetimeFigureOut">
-              <a:t>6/16/24</a:t>
+              <a:t>6/22/24</a:t>
             </a:fld>
             <a:endParaRPr lang="en-US"/>
           </a:p>
@@ -2434,7 +2434,7 @@
           <a:lstStyle/>
           <a:p>
             <a:fld id="{5F491023-0B0A-7041-9F06-D25A50EF063B}" type="datetimeFigureOut">
-              <a:t>6/16/24</a:t>
+              <a:t>6/22/24</a:t>
             </a:fld>
             <a:endParaRPr lang="en-US"/>
           </a:p>
@@ -2573,7 +2573,7 @@
           <a:lstStyle/>
           <a:p>
             <a:fld id="{5F491023-0B0A-7041-9F06-D25A50EF063B}" type="datetimeFigureOut">
-              <a:t>6/16/24</a:t>
+              <a:t>6/22/24</a:t>
             </a:fld>
             <a:endParaRPr lang="en-US"/>
           </a:p>
@@ -2684,7 +2684,7 @@
           <a:lstStyle/>
           <a:p>
             <a:fld id="{5F491023-0B0A-7041-9F06-D25A50EF063B}" type="datetimeFigureOut">
-              <a:t>6/16/24</a:t>
+              <a:t>6/22/24</a:t>
             </a:fld>
             <a:endParaRPr lang="en-US"/>
           </a:p>
@@ -2993,7 +2993,7 @@
           <a:lstStyle/>
           <a:p>
             <a:fld id="{5F491023-0B0A-7041-9F06-D25A50EF063B}" type="datetimeFigureOut">
-              <a:t>6/16/24</a:t>
+              <a:t>6/22/24</a:t>
             </a:fld>
             <a:endParaRPr lang="en-US"/>
           </a:p>
@@ -3279,7 +3279,7 @@
           <a:lstStyle/>
           <a:p>
             <a:fld id="{5F491023-0B0A-7041-9F06-D25A50EF063B}" type="datetimeFigureOut">
-              <a:t>6/16/24</a:t>
+              <a:t>6/22/24</a:t>
             </a:fld>
             <a:endParaRPr lang="en-US"/>
           </a:p>
@@ -3518,7 +3518,7 @@
           </a:lstStyle>
           <a:p>
             <a:fld id="{5F491023-0B0A-7041-9F06-D25A50EF063B}" type="datetimeFigureOut">
-              <a:t>6/16/24</a:t>
+              <a:t>6/22/24</a:t>
             </a:fld>
             <a:endParaRPr lang="en-US"/>
           </a:p>
@@ -7024,19 +7024,7 @@
               <a:rPr lang="en-US" sz="1200" dirty="0">
                 <a:hlinkClick r:id="rId12"/>
               </a:rPr>
-              <a:t>https://</a:t>
-            </a:r>
-            <a:r>
-              <a:rPr lang="en-US" sz="1200" dirty="0" err="1">
-                <a:hlinkClick r:id="rId12"/>
-              </a:rPr>
-              <a:t>cdnimages.opentip.com</a:t>
-            </a:r>
-            <a:r>
-              <a:rPr lang="en-US" sz="1200" dirty="0">
-                <a:hlinkClick r:id="rId12"/>
-              </a:rPr>
-              <a:t>/Docs/DLA/gains300install.pdf</a:t>
+              <a:t>https://cdnimages.opentip.com/Docs/DLA/gains300install.pdf</a:t>
             </a:r>
             <a:endParaRPr lang="en-US" sz="1200" dirty="0"/>
           </a:p>
@@ -7165,7 +7153,7 @@
         <p:spPr>
           <a:xfrm>
             <a:off x="5478052" y="3933445"/>
-            <a:ext cx="2277071" cy="461665"/>
+            <a:ext cx="2277071" cy="1384995"/>
           </a:xfrm>
           <a:prstGeom prst="rect">
             <a:avLst/>
@@ -7230,6 +7218,113 @@
                 <a:latin typeface="Amazon Ember"/>
               </a:rPr>
               <a:t>Back plate – gold (bright brass)</a:t>
+            </a:r>
+          </a:p>
+          <a:p>
+            <a:endParaRPr lang="en-US" sz="1200" dirty="0">
+              <a:solidFill>
+                <a:srgbClr val="0F1111"/>
+              </a:solidFill>
+              <a:highlight>
+                <a:srgbClr val="FFFFFF"/>
+              </a:highlight>
+              <a:latin typeface="Amazon Ember"/>
+            </a:endParaRPr>
+          </a:p>
+          <a:p>
+            <a:r>
+              <a:rPr lang="en-US" sz="1200" b="0" i="0" dirty="0">
+                <a:solidFill>
+                  <a:srgbClr val="0F1111"/>
+                </a:solidFill>
+                <a:effectLst/>
+                <a:highlight>
+                  <a:srgbClr val="FFFFFF"/>
+                </a:highlight>
+                <a:latin typeface="Amazon Ember"/>
+              </a:rPr>
+              <a:t>Installation drills:</a:t>
+            </a:r>
+            <a:br>
+              <a:rPr lang="en-US" sz="1200" b="0" i="0" dirty="0">
+                <a:solidFill>
+                  <a:srgbClr val="0F1111"/>
+                </a:solidFill>
+                <a:effectLst/>
+                <a:highlight>
+                  <a:srgbClr val="FFFFFF"/>
+                </a:highlight>
+                <a:latin typeface="Amazon Ember"/>
+              </a:rPr>
+            </a:br>
+            <a:r>
+              <a:rPr lang="en-US" sz="1200" b="0" i="0" dirty="0">
+                <a:solidFill>
+                  <a:srgbClr val="0F1111"/>
+                </a:solidFill>
+                <a:effectLst/>
+                <a:highlight>
+                  <a:srgbClr val="FFFFFF"/>
+                </a:highlight>
+                <a:latin typeface="Amazon Ember"/>
+              </a:rPr>
+              <a:t>9.5mm (3/8") </a:t>
+            </a:r>
+          </a:p>
+          <a:p>
+            <a:r>
+              <a:rPr lang="en-US" sz="1200" b="0" i="0">
+                <a:solidFill>
+                  <a:srgbClr val="0F1111"/>
+                </a:solidFill>
+                <a:effectLst/>
+                <a:highlight>
+                  <a:srgbClr val="FFFFFF"/>
+                </a:highlight>
+                <a:latin typeface="Amazon Ember"/>
+              </a:rPr>
+              <a:t>35mm </a:t>
+            </a:r>
+            <a:r>
+              <a:rPr lang="en-US" sz="1200" b="0" i="0" dirty="0">
+                <a:solidFill>
+                  <a:srgbClr val="0F1111"/>
+                </a:solidFill>
+                <a:effectLst/>
+                <a:highlight>
+                  <a:srgbClr val="FFFFFF"/>
+                </a:highlight>
+                <a:latin typeface="Amazon Ember"/>
+              </a:rPr>
+              <a:t>(1 3/8")</a:t>
+            </a:r>
+          </a:p>
+          <a:p>
+            <a:r>
+              <a:rPr lang="en-US" sz="1200" b="0" i="0">
+                <a:solidFill>
+                  <a:srgbClr val="0F1111"/>
+                </a:solidFill>
+                <a:effectLst/>
+                <a:highlight>
+                  <a:srgbClr val="FFFFFF"/>
+                </a:highlight>
+                <a:latin typeface="Amazon Ember"/>
+              </a:rPr>
+              <a:t>25mm </a:t>
+            </a:r>
+            <a:r>
+              <a:rPr lang="en-US" sz="1200" b="0" i="0" dirty="0">
+                <a:solidFill>
+                  <a:srgbClr val="0F1111"/>
+                </a:solidFill>
+                <a:effectLst/>
+                <a:highlight>
+                  <a:srgbClr val="FFFFFF"/>
+                </a:highlight>
+                <a:latin typeface="Amazon Ember"/>
+              </a:rPr>
+              <a:t>(1")</a:t>
             </a:r>
           </a:p>
         </p:txBody>
